--- a/Schedules_main.pptx
+++ b/Schedules_main.pptx
@@ -15,8 +15,8 @@
     <p:sldId id="258" r:id="rId9"/>
     <p:sldId id="259" r:id="rId10"/>
     <p:sldId id="264" r:id="rId11"/>
-    <p:sldId id="263" r:id="rId12"/>
-    <p:sldId id="269" r:id="rId13"/>
+    <p:sldId id="269" r:id="rId12"/>
+    <p:sldId id="263" r:id="rId13"/>
     <p:sldId id="262" r:id="rId14"/>
     <p:sldId id="261" r:id="rId15"/>
   </p:sldIdLst>
@@ -129,6 +129,7 @@
 <p1510:revInfo xmlns:a="http://schemas.openxmlformats.org/drawingml/2006/main" xmlns:r="http://schemas.openxmlformats.org/officeDocument/2006/relationships" xmlns:p1510="http://schemas.microsoft.com/office/powerpoint/2015/10/main">
   <p1510:revLst>
     <p1510:client id="{3BAABB8E-965C-4469-B16F-F6ECC8812E6B}" v="1" dt="2025-11-24T11:40:50.413"/>
+    <p1510:client id="{D372128E-F29A-4FF8-90EC-05D9451787E5}" v="1" dt="2025-11-24T12:16:07.371"/>
   </p1510:revLst>
 </p1510:revInfo>
 </file>
@@ -138,16 +139,24 @@
   <pc:docChgLst>
     <pc:chgData name="Iker Joaquín" userId="acaffbe4a706a9d4" providerId="LiveId" clId="{D1DFD0CF-3B6A-4A93-9F8B-FF939B2F1C04}"/>
     <pc:docChg chg="undo custSel addSld modSld sldOrd">
-      <pc:chgData name="Iker Joaquín" userId="acaffbe4a706a9d4" providerId="LiveId" clId="{D1DFD0CF-3B6A-4A93-9F8B-FF939B2F1C04}" dt="2025-11-24T11:43:31.312" v="107"/>
+      <pc:chgData name="Iker Joaquín" userId="acaffbe4a706a9d4" providerId="LiveId" clId="{D1DFD0CF-3B6A-4A93-9F8B-FF939B2F1C04}" dt="2025-11-24T12:16:22.612" v="140" actId="20577"/>
       <pc:docMkLst>
         <pc:docMk/>
       </pc:docMkLst>
-      <pc:sldChg chg="addSp">
-        <pc:chgData name="Iker Joaquín" userId="acaffbe4a706a9d4" providerId="LiveId" clId="{D1DFD0CF-3B6A-4A93-9F8B-FF939B2F1C04}" dt="2025-11-24T11:40:50.413" v="4"/>
+      <pc:sldChg chg="addSp modSp mod">
+        <pc:chgData name="Iker Joaquín" userId="acaffbe4a706a9d4" providerId="LiveId" clId="{D1DFD0CF-3B6A-4A93-9F8B-FF939B2F1C04}" dt="2025-11-24T12:16:22.612" v="140" actId="20577"/>
         <pc:sldMkLst>
           <pc:docMk/>
           <pc:sldMk cId="2559727546" sldId="259"/>
         </pc:sldMkLst>
+        <pc:spChg chg="mod">
+          <ac:chgData name="Iker Joaquín" userId="acaffbe4a706a9d4" providerId="LiveId" clId="{D1DFD0CF-3B6A-4A93-9F8B-FF939B2F1C04}" dt="2025-11-24T12:16:22.612" v="140" actId="20577"/>
+          <ac:spMkLst>
+            <pc:docMk/>
+            <pc:sldMk cId="2559727546" sldId="259"/>
+            <ac:spMk id="2" creationId="{00000000-0000-0000-0000-000000000000}"/>
+          </ac:spMkLst>
+        </pc:spChg>
         <pc:picChg chg="add">
           <ac:chgData name="Iker Joaquín" userId="acaffbe4a706a9d4" providerId="LiveId" clId="{D1DFD0CF-3B6A-4A93-9F8B-FF939B2F1C04}" dt="2025-11-24T11:40:50.413" v="4"/>
           <ac:picMkLst>
@@ -156,6 +165,13 @@
             <ac:picMk id="3" creationId="{70FE3505-2832-17D5-FAA4-5C84D05B3612}"/>
           </ac:picMkLst>
         </pc:picChg>
+      </pc:sldChg>
+      <pc:sldChg chg="ord">
+        <pc:chgData name="Iker Joaquín" userId="acaffbe4a706a9d4" providerId="LiveId" clId="{D1DFD0CF-3B6A-4A93-9F8B-FF939B2F1C04}" dt="2025-11-24T12:15:55.419" v="113"/>
+        <pc:sldMkLst>
+          <pc:docMk/>
+          <pc:sldMk cId="1413589051" sldId="262"/>
+        </pc:sldMkLst>
       </pc:sldChg>
       <pc:sldChg chg="modSp mod">
         <pc:chgData name="Iker Joaquín" userId="acaffbe4a706a9d4" providerId="LiveId" clId="{D1DFD0CF-3B6A-4A93-9F8B-FF939B2F1C04}" dt="2025-11-24T11:40:42.530" v="3" actId="1076"/>
@@ -282,6 +298,13 @@
           </ac:picMkLst>
         </pc:picChg>
       </pc:sldChg>
+      <pc:sldChg chg="ord">
+        <pc:chgData name="Iker Joaquín" userId="acaffbe4a706a9d4" providerId="LiveId" clId="{D1DFD0CF-3B6A-4A93-9F8B-FF939B2F1C04}" dt="2025-11-24T12:15:51.371" v="109"/>
+        <pc:sldMkLst>
+          <pc:docMk/>
+          <pc:sldMk cId="773652378" sldId="269"/>
+        </pc:sldMkLst>
+      </pc:sldChg>
     </pc:docChg>
   </pc:docChgLst>
 </pc:chgInfo>
@@ -458,7 +481,7 @@
           <a:p>
             <a:fld id="{D5632909-F848-46C4-A1DA-D7EC428885C6}" type="slidenum">
               <a:rPr lang="cs-CZ" smtClean="0"/>
-              <a:t>‹#›</a:t>
+              <a:t>‹Nº›</a:t>
             </a:fld>
             <a:endParaRPr lang="cs-CZ"/>
           </a:p>
@@ -626,7 +649,7 @@
           <a:p>
             <a:fld id="{D5632909-F848-46C4-A1DA-D7EC428885C6}" type="slidenum">
               <a:rPr lang="cs-CZ" smtClean="0"/>
-              <a:t>‹#›</a:t>
+              <a:t>‹Nº›</a:t>
             </a:fld>
             <a:endParaRPr lang="cs-CZ"/>
           </a:p>
@@ -804,7 +827,7 @@
           <a:p>
             <a:fld id="{D5632909-F848-46C4-A1DA-D7EC428885C6}" type="slidenum">
               <a:rPr lang="cs-CZ" smtClean="0"/>
-              <a:t>‹#›</a:t>
+              <a:t>‹Nº›</a:t>
             </a:fld>
             <a:endParaRPr lang="cs-CZ"/>
           </a:p>
@@ -972,7 +995,7 @@
           <a:p>
             <a:fld id="{D5632909-F848-46C4-A1DA-D7EC428885C6}" type="slidenum">
               <a:rPr lang="cs-CZ" smtClean="0"/>
-              <a:t>‹#›</a:t>
+              <a:t>‹Nº›</a:t>
             </a:fld>
             <a:endParaRPr lang="cs-CZ"/>
           </a:p>
@@ -1217,7 +1240,7 @@
           <a:p>
             <a:fld id="{D5632909-F848-46C4-A1DA-D7EC428885C6}" type="slidenum">
               <a:rPr lang="cs-CZ" smtClean="0"/>
-              <a:t>‹#›</a:t>
+              <a:t>‹Nº›</a:t>
             </a:fld>
             <a:endParaRPr lang="cs-CZ"/>
           </a:p>
@@ -1446,7 +1469,7 @@
           <a:p>
             <a:fld id="{D5632909-F848-46C4-A1DA-D7EC428885C6}" type="slidenum">
               <a:rPr lang="cs-CZ" smtClean="0"/>
-              <a:t>‹#›</a:t>
+              <a:t>‹Nº›</a:t>
             </a:fld>
             <a:endParaRPr lang="cs-CZ"/>
           </a:p>
@@ -1810,7 +1833,7 @@
           <a:p>
             <a:fld id="{D5632909-F848-46C4-A1DA-D7EC428885C6}" type="slidenum">
               <a:rPr lang="cs-CZ" smtClean="0"/>
-              <a:t>‹#›</a:t>
+              <a:t>‹Nº›</a:t>
             </a:fld>
             <a:endParaRPr lang="cs-CZ"/>
           </a:p>
@@ -1927,7 +1950,7 @@
           <a:p>
             <a:fld id="{D5632909-F848-46C4-A1DA-D7EC428885C6}" type="slidenum">
               <a:rPr lang="cs-CZ" smtClean="0"/>
-              <a:t>‹#›</a:t>
+              <a:t>‹Nº›</a:t>
             </a:fld>
             <a:endParaRPr lang="cs-CZ"/>
           </a:p>
@@ -2022,7 +2045,7 @@
           <a:p>
             <a:fld id="{D5632909-F848-46C4-A1DA-D7EC428885C6}" type="slidenum">
               <a:rPr lang="cs-CZ" smtClean="0"/>
-              <a:t>‹#›</a:t>
+              <a:t>‹Nº›</a:t>
             </a:fld>
             <a:endParaRPr lang="cs-CZ"/>
           </a:p>
@@ -2297,7 +2320,7 @@
           <a:p>
             <a:fld id="{D5632909-F848-46C4-A1DA-D7EC428885C6}" type="slidenum">
               <a:rPr lang="cs-CZ" smtClean="0"/>
-              <a:t>‹#›</a:t>
+              <a:t>‹Nº›</a:t>
             </a:fld>
             <a:endParaRPr lang="cs-CZ"/>
           </a:p>
@@ -2549,7 +2572,7 @@
           <a:p>
             <a:fld id="{D5632909-F848-46C4-A1DA-D7EC428885C6}" type="slidenum">
               <a:rPr lang="cs-CZ" smtClean="0"/>
-              <a:t>‹#›</a:t>
+              <a:t>‹Nº›</a:t>
             </a:fld>
             <a:endParaRPr lang="cs-CZ"/>
           </a:p>
@@ -2796,7 +2819,7 @@
           <a:p>
             <a:fld id="{D5632909-F848-46C4-A1DA-D7EC428885C6}" type="slidenum">
               <a:rPr lang="cs-CZ" smtClean="0"/>
-              <a:t>‹#›</a:t>
+              <a:t>‹Nº›</a:t>
             </a:fld>
             <a:endParaRPr lang="cs-CZ"/>
           </a:p>
@@ -3435,85 +3458,6 @@
   <p:cSld>
     <p:spTree>
       <p:nvGrpSpPr>
-        <p:cNvPr id="1" name=""/>
-        <p:cNvGrpSpPr/>
-        <p:nvPr/>
-      </p:nvGrpSpPr>
-      <p:grpSpPr>
-        <a:xfrm>
-          <a:off x="0" y="0"/>
-          <a:ext cx="0" cy="0"/>
-          <a:chOff x="0" y="0"/>
-          <a:chExt cx="0" cy="0"/>
-        </a:xfrm>
-      </p:grpSpPr>
-      <p:sp>
-        <p:nvSpPr>
-          <p:cNvPr id="2" name="Nadpis 1"/>
-          <p:cNvSpPr>
-            <a:spLocks noGrp="1"/>
-          </p:cNvSpPr>
-          <p:nvPr>
-            <p:ph type="title"/>
-          </p:nvPr>
-        </p:nvSpPr>
-        <p:spPr/>
-        <p:txBody>
-          <a:bodyPr/>
-          <a:lstStyle/>
-          <a:p>
-            <a:r>
-              <a:rPr lang="en-US" dirty="0"/>
-              <a:t>Dynamic diagram – Office hours</a:t>
-            </a:r>
-            <a:endParaRPr lang="cs-CZ" dirty="0"/>
-          </a:p>
-        </p:txBody>
-      </p:sp>
-      <p:pic>
-        <p:nvPicPr>
-          <p:cNvPr id="4" name="Zástupný symbol pro obsah 3"/>
-          <p:cNvPicPr>
-            <a:picLocks noGrp="1" noChangeAspect="1"/>
-          </p:cNvPicPr>
-          <p:nvPr>
-            <p:ph idx="1"/>
-          </p:nvPr>
-        </p:nvPicPr>
-        <p:blipFill>
-          <a:blip r:embed="rId2"/>
-          <a:stretch>
-            <a:fillRect/>
-          </a:stretch>
-        </p:blipFill>
-        <p:spPr>
-          <a:xfrm>
-            <a:off x="1015482" y="1322761"/>
-            <a:ext cx="10161036" cy="5535239"/>
-          </a:xfrm>
-          <a:prstGeom prst="rect">
-            <a:avLst/>
-          </a:prstGeom>
-        </p:spPr>
-      </p:pic>
-    </p:spTree>
-    <p:extLst>
-      <p:ext uri="{BB962C8B-B14F-4D97-AF65-F5344CB8AC3E}">
-        <p14:creationId xmlns:p14="http://schemas.microsoft.com/office/powerpoint/2010/main" val="156025415"/>
-      </p:ext>
-    </p:extLst>
-  </p:cSld>
-  <p:clrMapOvr>
-    <a:masterClrMapping/>
-  </p:clrMapOvr>
-</p:sld>
-</file>
-
-<file path=ppt/slides/slide12.xml><?xml version="1.0" encoding="utf-8"?>
-<p:sld xmlns:a="http://schemas.openxmlformats.org/drawingml/2006/main" xmlns:r="http://schemas.openxmlformats.org/officeDocument/2006/relationships" xmlns:p="http://schemas.openxmlformats.org/presentationml/2006/main">
-  <p:cSld>
-    <p:spTree>
-      <p:nvGrpSpPr>
         <p:cNvPr id="1" name="">
           <a:extLst>
             <a:ext uri="{FF2B5EF4-FFF2-40B4-BE49-F238E27FC236}">
@@ -3600,6 +3544,85 @@
     <p:extLst>
       <p:ext uri="{BB962C8B-B14F-4D97-AF65-F5344CB8AC3E}">
         <p14:creationId xmlns:p14="http://schemas.microsoft.com/office/powerpoint/2010/main" val="773652378"/>
+      </p:ext>
+    </p:extLst>
+  </p:cSld>
+  <p:clrMapOvr>
+    <a:masterClrMapping/>
+  </p:clrMapOvr>
+</p:sld>
+</file>
+
+<file path=ppt/slides/slide12.xml><?xml version="1.0" encoding="utf-8"?>
+<p:sld xmlns:a="http://schemas.openxmlformats.org/drawingml/2006/main" xmlns:r="http://schemas.openxmlformats.org/officeDocument/2006/relationships" xmlns:p="http://schemas.openxmlformats.org/presentationml/2006/main">
+  <p:cSld>
+    <p:spTree>
+      <p:nvGrpSpPr>
+        <p:cNvPr id="1" name=""/>
+        <p:cNvGrpSpPr/>
+        <p:nvPr/>
+      </p:nvGrpSpPr>
+      <p:grpSpPr>
+        <a:xfrm>
+          <a:off x="0" y="0"/>
+          <a:ext cx="0" cy="0"/>
+          <a:chOff x="0" y="0"/>
+          <a:chExt cx="0" cy="0"/>
+        </a:xfrm>
+      </p:grpSpPr>
+      <p:sp>
+        <p:nvSpPr>
+          <p:cNvPr id="2" name="Nadpis 1"/>
+          <p:cNvSpPr>
+            <a:spLocks noGrp="1"/>
+          </p:cNvSpPr>
+          <p:nvPr>
+            <p:ph type="title"/>
+          </p:nvPr>
+        </p:nvSpPr>
+        <p:spPr/>
+        <p:txBody>
+          <a:bodyPr/>
+          <a:lstStyle/>
+          <a:p>
+            <a:r>
+              <a:rPr lang="en-US" dirty="0"/>
+              <a:t>Dynamic diagram – Office hours</a:t>
+            </a:r>
+            <a:endParaRPr lang="cs-CZ" dirty="0"/>
+          </a:p>
+        </p:txBody>
+      </p:sp>
+      <p:pic>
+        <p:nvPicPr>
+          <p:cNvPr id="4" name="Zástupný symbol pro obsah 3"/>
+          <p:cNvPicPr>
+            <a:picLocks noGrp="1" noChangeAspect="1"/>
+          </p:cNvPicPr>
+          <p:nvPr>
+            <p:ph idx="1"/>
+          </p:nvPr>
+        </p:nvPicPr>
+        <p:blipFill>
+          <a:blip r:embed="rId2"/>
+          <a:stretch>
+            <a:fillRect/>
+          </a:stretch>
+        </p:blipFill>
+        <p:spPr>
+          <a:xfrm>
+            <a:off x="1015482" y="1322761"/>
+            <a:ext cx="10161036" cy="5535239"/>
+          </a:xfrm>
+          <a:prstGeom prst="rect">
+            <a:avLst/>
+          </a:prstGeom>
+        </p:spPr>
+      </p:pic>
+    </p:spTree>
+    <p:extLst>
+      <p:ext uri="{BB962C8B-B14F-4D97-AF65-F5344CB8AC3E}">
+        <p14:creationId xmlns:p14="http://schemas.microsoft.com/office/powerpoint/2010/main" val="156025415"/>
       </p:ext>
     </p:extLst>
   </p:cSld>
@@ -4840,7 +4863,14 @@
           <a:p>
             <a:r>
               <a:rPr lang="en-US" dirty="0"/>
-              <a:t>Statistics L3</a:t>
+              <a:t>L3 diagram -</a:t>
+            </a:r>
+            <a:br>
+              <a:rPr lang="en-US" dirty="0"/>
+            </a:br>
+            <a:r>
+              <a:rPr lang="en-US" dirty="0"/>
+              <a:t>Statistics</a:t>
             </a:r>
             <a:endParaRPr lang="cs-CZ" dirty="0"/>
           </a:p>

--- a/Schedules_main.pptx
+++ b/Schedules_main.pptx
@@ -139,12 +139,12 @@
   <pc:docChgLst>
     <pc:chgData name="Iker Joaquín" userId="acaffbe4a706a9d4" providerId="LiveId" clId="{D1DFD0CF-3B6A-4A93-9F8B-FF939B2F1C04}"/>
     <pc:docChg chg="undo custSel addSld modSld sldOrd">
-      <pc:chgData name="Iker Joaquín" userId="acaffbe4a706a9d4" providerId="LiveId" clId="{D1DFD0CF-3B6A-4A93-9F8B-FF939B2F1C04}" dt="2025-11-24T12:16:22.612" v="140" actId="20577"/>
+      <pc:chgData name="Iker Joaquín" userId="acaffbe4a706a9d4" providerId="LiveId" clId="{D1DFD0CF-3B6A-4A93-9F8B-FF939B2F1C04}" dt="2025-11-24T12:18:01.074" v="141" actId="478"/>
       <pc:docMkLst>
         <pc:docMk/>
       </pc:docMkLst>
-      <pc:sldChg chg="addSp modSp mod">
-        <pc:chgData name="Iker Joaquín" userId="acaffbe4a706a9d4" providerId="LiveId" clId="{D1DFD0CF-3B6A-4A93-9F8B-FF939B2F1C04}" dt="2025-11-24T12:16:22.612" v="140" actId="20577"/>
+      <pc:sldChg chg="addSp delSp modSp mod">
+        <pc:chgData name="Iker Joaquín" userId="acaffbe4a706a9d4" providerId="LiveId" clId="{D1DFD0CF-3B6A-4A93-9F8B-FF939B2F1C04}" dt="2025-11-24T12:18:01.074" v="141" actId="478"/>
         <pc:sldMkLst>
           <pc:docMk/>
           <pc:sldMk cId="2559727546" sldId="259"/>
@@ -157,8 +157,8 @@
             <ac:spMk id="2" creationId="{00000000-0000-0000-0000-000000000000}"/>
           </ac:spMkLst>
         </pc:spChg>
-        <pc:picChg chg="add">
-          <ac:chgData name="Iker Joaquín" userId="acaffbe4a706a9d4" providerId="LiveId" clId="{D1DFD0CF-3B6A-4A93-9F8B-FF939B2F1C04}" dt="2025-11-24T11:40:50.413" v="4"/>
+        <pc:picChg chg="add del">
+          <ac:chgData name="Iker Joaquín" userId="acaffbe4a706a9d4" providerId="LiveId" clId="{D1DFD0CF-3B6A-4A93-9F8B-FF939B2F1C04}" dt="2025-11-24T12:18:01.074" v="141" actId="478"/>
           <ac:picMkLst>
             <pc:docMk/>
             <pc:sldMk cId="2559727546" sldId="259"/>
@@ -4902,36 +4902,6 @@
           </a:prstGeom>
         </p:spPr>
       </p:pic>
-      <p:pic>
-        <p:nvPicPr>
-          <p:cNvPr id="3" name="Imagen 2">
-            <a:extLst>
-              <a:ext uri="{FF2B5EF4-FFF2-40B4-BE49-F238E27FC236}">
-                <a16:creationId xmlns:a16="http://schemas.microsoft.com/office/drawing/2014/main" id="{70FE3505-2832-17D5-FAA4-5C84D05B3612}"/>
-              </a:ext>
-            </a:extLst>
-          </p:cNvPr>
-          <p:cNvPicPr>
-            <a:picLocks noChangeAspect="1"/>
-          </p:cNvPicPr>
-          <p:nvPr/>
-        </p:nvPicPr>
-        <p:blipFill>
-          <a:blip r:embed="rId3"/>
-          <a:stretch>
-            <a:fillRect/>
-          </a:stretch>
-        </p:blipFill>
-        <p:spPr>
-          <a:xfrm>
-            <a:off x="3047736" y="1714351"/>
-            <a:ext cx="6096528" cy="3429297"/>
-          </a:xfrm>
-          <a:prstGeom prst="rect">
-            <a:avLst/>
-          </a:prstGeom>
-        </p:spPr>
-      </p:pic>
     </p:spTree>
     <p:extLst>
       <p:ext uri="{BB962C8B-B14F-4D97-AF65-F5344CB8AC3E}">
